--- a/docs/QP_overview.pptx
+++ b/docs/QP_overview.pptx
@@ -3312,13 +3312,16 @@
                 <a:solidFill>
                   <a:srgbClr val="F8FAFC"/>
                 </a:solidFill>
-                <a:latin typeface="Playfair Display" pitchFamily="34" charset="0"/>
+                <a:latin typeface="Calibri" panose="020F0502020204030204" pitchFamily="34" charset="0"/>
                 <a:ea typeface="Playfair Display" pitchFamily="34" charset="-122"/>
-                <a:cs typeface="Playfair Display" pitchFamily="34" charset="-120"/>
+                <a:cs typeface="Calibri" panose="020F0502020204030204" pitchFamily="34" charset="0"/>
               </a:rPr>
               <a:t>Simple architecture, clear workflow</a:t>
             </a:r>
-            <a:endParaRPr lang="en-US" sz="3600" dirty="0"/>
+            <a:endParaRPr lang="en-US" sz="3600" dirty="0">
+              <a:latin typeface="Calibri" panose="020F0502020204030204" pitchFamily="34" charset="0"/>
+              <a:cs typeface="Calibri" panose="020F0502020204030204" pitchFamily="34" charset="0"/>
+            </a:endParaRPr>
           </a:p>
         </p:txBody>
       </p:sp>
@@ -3400,9 +3403,23 @@
                 <a:ea typeface="ui-sans-serif" pitchFamily="34" charset="-122"/>
                 <a:cs typeface="ui-sans-serif" pitchFamily="34" charset="-120"/>
               </a:rPr>
-              <a:t>Asset JSON</a:t>
-            </a:r>
-            <a:endParaRPr lang="en-US" sz="1200" dirty="0"/>
+              <a:t>Asset </a:t>
+            </a:r>
+            <a:r>
+              <a:rPr lang="en-US" sz="1200" b="1" dirty="0">
+                <a:solidFill>
+                  <a:srgbClr val="F8FAFC"/>
+                </a:solidFill>
+                <a:latin typeface="Calibri" panose="020F0502020204030204" pitchFamily="34" charset="0"/>
+                <a:ea typeface="ui-sans-serif" pitchFamily="34" charset="-122"/>
+                <a:cs typeface="Calibri" panose="020F0502020204030204" pitchFamily="34" charset="0"/>
+              </a:rPr>
+              <a:t>JSON</a:t>
+            </a:r>
+            <a:endParaRPr lang="en-US" sz="1200" dirty="0">
+              <a:latin typeface="Calibri" panose="020F0502020204030204" pitchFamily="34" charset="0"/>
+              <a:cs typeface="Calibri" panose="020F0502020204030204" pitchFamily="34" charset="0"/>
+            </a:endParaRPr>
           </a:p>
         </p:txBody>
       </p:sp>
@@ -3522,13 +3539,16 @@
                 <a:solidFill>
                   <a:srgbClr val="F8FAFC"/>
                 </a:solidFill>
-                <a:latin typeface="ui-sans-serif" pitchFamily="34" charset="0"/>
-                <a:ea typeface="ui-sans-serif" pitchFamily="34" charset="-122"/>
-                <a:cs typeface="ui-sans-serif" pitchFamily="34" charset="-120"/>
+                <a:latin typeface="Calibri" panose="020F0502020204030204" pitchFamily="34" charset="0"/>
+                <a:ea typeface="ui-sans-serif" pitchFamily="34" charset="-122"/>
+                <a:cs typeface="Calibri" panose="020F0502020204030204" pitchFamily="34" charset="0"/>
               </a:rPr>
               <a:t>Curves</a:t>
             </a:r>
-            <a:endParaRPr lang="en-US" sz="1200" dirty="0"/>
+            <a:endParaRPr lang="en-US" sz="1200" dirty="0">
+              <a:latin typeface="Calibri" panose="020F0502020204030204" pitchFamily="34" charset="0"/>
+              <a:cs typeface="Calibri" panose="020F0502020204030204" pitchFamily="34" charset="0"/>
+            </a:endParaRPr>
           </a:p>
         </p:txBody>
       </p:sp>
@@ -3648,13 +3668,16 @@
                 <a:solidFill>
                   <a:srgbClr val="F8FAFC"/>
                 </a:solidFill>
-                <a:latin typeface="ui-sans-serif" pitchFamily="34" charset="0"/>
-                <a:ea typeface="ui-sans-serif" pitchFamily="34" charset="-122"/>
-                <a:cs typeface="ui-sans-serif" pitchFamily="34" charset="-120"/>
+                <a:latin typeface="Calibri" panose="020F0502020204030204" pitchFamily="34" charset="0"/>
+                <a:ea typeface="ui-sans-serif" pitchFamily="34" charset="-122"/>
+                <a:cs typeface="Calibri" panose="020F0502020204030204" pitchFamily="34" charset="0"/>
               </a:rPr>
               <a:t>Dispatcher</a:t>
             </a:r>
-            <a:endParaRPr lang="en-US" sz="1200" dirty="0"/>
+            <a:endParaRPr lang="en-US" sz="1200" dirty="0">
+              <a:latin typeface="Calibri" panose="020F0502020204030204" pitchFamily="34" charset="0"/>
+              <a:cs typeface="Calibri" panose="020F0502020204030204" pitchFamily="34" charset="0"/>
+            </a:endParaRPr>
           </a:p>
         </p:txBody>
       </p:sp>
@@ -3778,9 +3801,23 @@
                 <a:ea typeface="ui-sans-serif" pitchFamily="34" charset="-122"/>
                 <a:cs typeface="ui-sans-serif" pitchFamily="34" charset="-120"/>
               </a:rPr>
-              <a:t>API layer</a:t>
-            </a:r>
-            <a:endParaRPr lang="en-US" sz="1200" dirty="0"/>
+              <a:t>API </a:t>
+            </a:r>
+            <a:r>
+              <a:rPr lang="en-US" sz="1200" b="1" dirty="0">
+                <a:solidFill>
+                  <a:srgbClr val="F8FAFC"/>
+                </a:solidFill>
+                <a:latin typeface="Calibri" panose="020F0502020204030204" pitchFamily="34" charset="0"/>
+                <a:ea typeface="ui-sans-serif" pitchFamily="34" charset="-122"/>
+                <a:cs typeface="Calibri" panose="020F0502020204030204" pitchFamily="34" charset="0"/>
+              </a:rPr>
+              <a:t>layer</a:t>
+            </a:r>
+            <a:endParaRPr lang="en-US" sz="1200" dirty="0">
+              <a:latin typeface="Calibri" panose="020F0502020204030204" pitchFamily="34" charset="0"/>
+              <a:cs typeface="Calibri" panose="020F0502020204030204" pitchFamily="34" charset="0"/>
+            </a:endParaRPr>
           </a:p>
         </p:txBody>
       </p:sp>
@@ -3900,13 +3937,16 @@
                 <a:solidFill>
                   <a:srgbClr val="F8FAFC"/>
                 </a:solidFill>
-                <a:latin typeface="ui-sans-serif" pitchFamily="34" charset="0"/>
-                <a:ea typeface="ui-sans-serif" pitchFamily="34" charset="-122"/>
-                <a:cs typeface="ui-sans-serif" pitchFamily="34" charset="-120"/>
+                <a:latin typeface="Calibri" panose="020F0502020204030204" pitchFamily="34" charset="0"/>
+                <a:ea typeface="ui-sans-serif" pitchFamily="34" charset="-122"/>
+                <a:cs typeface="Calibri" panose="020F0502020204030204" pitchFamily="34" charset="0"/>
               </a:rPr>
               <a:t>Frontend</a:t>
             </a:r>
-            <a:endParaRPr lang="en-US" sz="1200" dirty="0"/>
+            <a:endParaRPr lang="en-US" sz="1200" dirty="0">
+              <a:latin typeface="Calibri" panose="020F0502020204030204" pitchFamily="34" charset="0"/>
+              <a:cs typeface="Calibri" panose="020F0502020204030204" pitchFamily="34" charset="0"/>
+            </a:endParaRPr>
           </a:p>
         </p:txBody>
       </p:sp>
@@ -4097,7 +4137,6 @@
                 <a:solidFill>
                   <a:srgbClr val="F8FAFC"/>
                 </a:solidFill>
-                <a:latin typeface="Playfair Display" pitchFamily="34" charset="0"/>
                 <a:ea typeface="Playfair Display" pitchFamily="34" charset="-122"/>
                 <a:cs typeface="Playfair Display" pitchFamily="34" charset="-120"/>
               </a:rPr>
@@ -4139,13 +4178,16 @@
                 <a:solidFill>
                   <a:srgbClr val="C9A84C"/>
                 </a:solidFill>
-                <a:latin typeface="ui-sans-serif" pitchFamily="34" charset="0"/>
-                <a:ea typeface="ui-sans-serif" pitchFamily="34" charset="-122"/>
-                <a:cs typeface="ui-sans-serif" pitchFamily="34" charset="-120"/>
+                <a:latin typeface="Calibri" panose="020F0502020204030204" pitchFamily="34" charset="0"/>
+                <a:ea typeface="ui-sans-serif" pitchFamily="34" charset="-122"/>
+                <a:cs typeface="Calibri" panose="020F0502020204030204" pitchFamily="34" charset="0"/>
               </a:rPr>
               <a:t>External providers</a:t>
             </a:r>
-            <a:endParaRPr lang="en-US" sz="1500" dirty="0"/>
+            <a:endParaRPr lang="en-US" sz="1500" dirty="0">
+              <a:latin typeface="Calibri" panose="020F0502020204030204" pitchFamily="34" charset="0"/>
+              <a:cs typeface="Calibri" panose="020F0502020204030204" pitchFamily="34" charset="0"/>
+            </a:endParaRPr>
           </a:p>
         </p:txBody>
       </p:sp>
@@ -4182,13 +4224,16 @@
                 <a:solidFill>
                   <a:srgbClr val="DBE4F0"/>
                 </a:solidFill>
-                <a:latin typeface="ui-sans-serif" pitchFamily="34" charset="0"/>
-                <a:ea typeface="ui-sans-serif" pitchFamily="34" charset="-122"/>
-                <a:cs typeface="ui-sans-serif" pitchFamily="34" charset="-120"/>
+                <a:latin typeface="Calibri" panose="020F0502020204030204" pitchFamily="34" charset="0"/>
+                <a:ea typeface="ui-sans-serif" pitchFamily="34" charset="-122"/>
+                <a:cs typeface="Calibri" panose="020F0502020204030204" pitchFamily="34" charset="0"/>
               </a:rPr>
               <a:t>Refinitiv Datastream for CDS spread histories used in CLN calibration.</a:t>
             </a:r>
-            <a:endParaRPr lang="en-US" sz="1350" dirty="0"/>
+            <a:endParaRPr lang="en-US" sz="1350" dirty="0">
+              <a:latin typeface="Calibri" panose="020F0502020204030204" pitchFamily="34" charset="0"/>
+              <a:cs typeface="Calibri" panose="020F0502020204030204" pitchFamily="34" charset="0"/>
+            </a:endParaRPr>
           </a:p>
           <a:p>
             <a:pPr marL="342900" indent="-342900">
@@ -4203,13 +4248,16 @@
                 <a:solidFill>
                   <a:srgbClr val="DBE4F0"/>
                 </a:solidFill>
-                <a:latin typeface="ui-sans-serif" pitchFamily="34" charset="0"/>
-                <a:ea typeface="ui-sans-serif" pitchFamily="34" charset="-122"/>
-                <a:cs typeface="ui-sans-serif" pitchFamily="34" charset="-120"/>
+                <a:latin typeface="Calibri" panose="020F0502020204030204" pitchFamily="34" charset="0"/>
+                <a:ea typeface="ui-sans-serif" pitchFamily="34" charset="-122"/>
+                <a:cs typeface="Calibri" panose="020F0502020204030204" pitchFamily="34" charset="0"/>
               </a:rPr>
               <a:t>CBonds for bond reference data and prices across fixed-income assets.</a:t>
             </a:r>
-            <a:endParaRPr lang="en-US" sz="1350" dirty="0"/>
+            <a:endParaRPr lang="en-US" sz="1350" dirty="0">
+              <a:latin typeface="Calibri" panose="020F0502020204030204" pitchFamily="34" charset="0"/>
+              <a:cs typeface="Calibri" panose="020F0502020204030204" pitchFamily="34" charset="0"/>
+            </a:endParaRPr>
           </a:p>
           <a:p>
             <a:pPr marL="342900" indent="-342900">
@@ -4224,13 +4272,16 @@
                 <a:solidFill>
                   <a:srgbClr val="DBE4F0"/>
                 </a:solidFill>
-                <a:latin typeface="ui-sans-serif" pitchFamily="34" charset="0"/>
-                <a:ea typeface="ui-sans-serif" pitchFamily="34" charset="-122"/>
-                <a:cs typeface="ui-sans-serif" pitchFamily="34" charset="-120"/>
+                <a:latin typeface="Calibri" panose="020F0502020204030204" pitchFamily="34" charset="0"/>
+                <a:ea typeface="ui-sans-serif" pitchFamily="34" charset="-122"/>
+                <a:cs typeface="Calibri" panose="020F0502020204030204" pitchFamily="34" charset="0"/>
               </a:rPr>
               <a:t>EODHD for equity price histories that support structured-product underlyings.</a:t>
             </a:r>
-            <a:endParaRPr lang="en-US" sz="1350" dirty="0"/>
+            <a:endParaRPr lang="en-US" sz="1350" dirty="0">
+              <a:latin typeface="Calibri" panose="020F0502020204030204" pitchFamily="34" charset="0"/>
+              <a:cs typeface="Calibri" panose="020F0502020204030204" pitchFamily="34" charset="0"/>
+            </a:endParaRPr>
           </a:p>
         </p:txBody>
       </p:sp>
@@ -4266,13 +4317,16 @@
                 <a:solidFill>
                   <a:srgbClr val="C9A84C"/>
                 </a:solidFill>
-                <a:latin typeface="ui-sans-serif" pitchFamily="34" charset="0"/>
-                <a:ea typeface="ui-sans-serif" pitchFamily="34" charset="-122"/>
-                <a:cs typeface="ui-sans-serif" pitchFamily="34" charset="-120"/>
+                <a:latin typeface="Calibri" panose="020F0502020204030204" pitchFamily="34" charset="0"/>
+                <a:ea typeface="ui-sans-serif" pitchFamily="34" charset="-122"/>
+                <a:cs typeface="Calibri" panose="020F0502020204030204" pitchFamily="34" charset="0"/>
               </a:rPr>
               <a:t>Internal storage</a:t>
             </a:r>
-            <a:endParaRPr lang="en-US" sz="1500" dirty="0"/>
+            <a:endParaRPr lang="en-US" sz="1500" dirty="0">
+              <a:latin typeface="Calibri" panose="020F0502020204030204" pitchFamily="34" charset="0"/>
+              <a:cs typeface="Calibri" panose="020F0502020204030204" pitchFamily="34" charset="0"/>
+            </a:endParaRPr>
           </a:p>
         </p:txBody>
       </p:sp>
@@ -4309,13 +4363,16 @@
                 <a:solidFill>
                   <a:srgbClr val="DBE4F0"/>
                 </a:solidFill>
-                <a:latin typeface="ui-sans-serif" pitchFamily="34" charset="0"/>
-                <a:ea typeface="ui-sans-serif" pitchFamily="34" charset="-122"/>
-                <a:cs typeface="ui-sans-serif" pitchFamily="34" charset="-120"/>
+                <a:latin typeface="Calibri" panose="020F0502020204030204" pitchFamily="34" charset="0"/>
+                <a:ea typeface="ui-sans-serif" pitchFamily="34" charset="-122"/>
+                <a:cs typeface="Calibri" panose="020F0502020204030204" pitchFamily="34" charset="0"/>
               </a:rPr>
               <a:t>MySQL stores assets, prices, and model schemas as JSON payloads.</a:t>
             </a:r>
-            <a:endParaRPr lang="en-US" sz="1350" dirty="0"/>
+            <a:endParaRPr lang="en-US" sz="1350" dirty="0">
+              <a:latin typeface="Calibri" panose="020F0502020204030204" pitchFamily="34" charset="0"/>
+              <a:cs typeface="Calibri" panose="020F0502020204030204" pitchFamily="34" charset="0"/>
+            </a:endParaRPr>
           </a:p>
           <a:p>
             <a:pPr marL="342900" indent="-342900">
@@ -4330,13 +4387,16 @@
                 <a:solidFill>
                   <a:srgbClr val="DBE4F0"/>
                 </a:solidFill>
-                <a:latin typeface="ui-sans-serif" pitchFamily="34" charset="0"/>
-                <a:ea typeface="ui-sans-serif" pitchFamily="34" charset="-122"/>
-                <a:cs typeface="ui-sans-serif" pitchFamily="34" charset="-120"/>
+                <a:latin typeface="Calibri" panose="020F0502020204030204" pitchFamily="34" charset="0"/>
+                <a:ea typeface="ui-sans-serif" pitchFamily="34" charset="-122"/>
+                <a:cs typeface="Calibri" panose="020F0502020204030204" pitchFamily="34" charset="0"/>
               </a:rPr>
               <a:t>Stored procedures handle writes and updates.</a:t>
             </a:r>
-            <a:endParaRPr lang="en-US" sz="1350" dirty="0"/>
+            <a:endParaRPr lang="en-US" sz="1350" dirty="0">
+              <a:latin typeface="Calibri" panose="020F0502020204030204" pitchFamily="34" charset="0"/>
+              <a:cs typeface="Calibri" panose="020F0502020204030204" pitchFamily="34" charset="0"/>
+            </a:endParaRPr>
           </a:p>
           <a:p>
             <a:pPr marL="342900" indent="-342900">
@@ -4351,13 +4411,16 @@
                 <a:solidFill>
                   <a:srgbClr val="DBE4F0"/>
                 </a:solidFill>
-                <a:latin typeface="ui-sans-serif" pitchFamily="34" charset="0"/>
-                <a:ea typeface="ui-sans-serif" pitchFamily="34" charset="-122"/>
-                <a:cs typeface="ui-sans-serif" pitchFamily="34" charset="-120"/>
+                <a:latin typeface="Calibri" panose="020F0502020204030204" pitchFamily="34" charset="0"/>
+                <a:ea typeface="ui-sans-serif" pitchFamily="34" charset="-122"/>
+                <a:cs typeface="Calibri" panose="020F0502020204030204" pitchFamily="34" charset="0"/>
               </a:rPr>
               <a:t>The API layer becomes the operational bridge between pricing logic and user workflows.</a:t>
             </a:r>
-            <a:endParaRPr lang="en-US" sz="1350" dirty="0"/>
+            <a:endParaRPr lang="en-US" sz="1350" dirty="0">
+              <a:latin typeface="Calibri" panose="020F0502020204030204" pitchFamily="34" charset="0"/>
+              <a:cs typeface="Calibri" panose="020F0502020204030204" pitchFamily="34" charset="0"/>
+            </a:endParaRPr>
           </a:p>
         </p:txBody>
       </p:sp>
@@ -4375,7 +4438,7 @@
         </p:nvSpPr>
         <p:spPr>
           <a:xfrm>
-            <a:off x="609600" y="167037"/>
+            <a:off x="609600" y="205912"/>
             <a:ext cx="2252546" cy="685800"/>
           </a:xfrm>
           <a:prstGeom prst="roundRect">
@@ -4458,8 +4521,8 @@
         </p:nvSpPr>
         <p:spPr>
           <a:xfrm>
-            <a:off x="3748832" y="194370"/>
-            <a:ext cx="1646337" cy="316111"/>
+            <a:off x="493181" y="194369"/>
+            <a:ext cx="1945219" cy="542925"/>
           </a:xfrm>
           <a:prstGeom prst="roundRect">
             <a:avLst>
@@ -4479,7 +4542,7 @@
         </p:spPr>
         <p:txBody>
           <a:bodyPr wrap="square" lIns="114300" tIns="114300" rIns="114300" bIns="114300" rtlCol="0" anchor="t">
-            <a:normAutofit fontScale="25000" lnSpcReduction="20000"/>
+            <a:noAutofit/>
           </a:bodyPr>
           <a:lstStyle/>
           <a:p>
@@ -4487,17 +4550,31 @@
               <a:buNone/>
             </a:pPr>
             <a:r>
-              <a:rPr lang="en-US" sz="1050" dirty="0">
+              <a:rPr lang="en-US" dirty="0">
                 <a:solidFill>
                   <a:srgbClr val="9FB0C7"/>
                 </a:solidFill>
-                <a:latin typeface="ui-sans-serif" pitchFamily="34" charset="0"/>
-                <a:ea typeface="ui-sans-serif" pitchFamily="34" charset="-122"/>
-                <a:cs typeface="ui-sans-serif" pitchFamily="34" charset="-120"/>
-              </a:rPr>
-              <a:t>Why it matters</a:t>
-            </a:r>
-            <a:endParaRPr lang="en-US" sz="1050" dirty="0"/>
+                <a:latin typeface="Calibri" panose="020F0502020204030204" pitchFamily="34" charset="0"/>
+                <a:ea typeface="ui-sans-serif" pitchFamily="34" charset="-122"/>
+                <a:cs typeface="Calibri" panose="020F0502020204030204" pitchFamily="34" charset="0"/>
+              </a:rPr>
+              <a:t>Why</a:t>
+            </a:r>
+            <a:r>
+              <a:rPr lang="en-US" sz="1600" dirty="0">
+                <a:solidFill>
+                  <a:srgbClr val="9FB0C7"/>
+                </a:solidFill>
+                <a:latin typeface="Calibri" panose="020F0502020204030204" pitchFamily="34" charset="0"/>
+                <a:ea typeface="ui-sans-serif" pitchFamily="34" charset="-122"/>
+                <a:cs typeface="Calibri" panose="020F0502020204030204" pitchFamily="34" charset="0"/>
+              </a:rPr>
+              <a:t> it matters</a:t>
+            </a:r>
+            <a:endParaRPr lang="en-US" sz="1600" dirty="0">
+              <a:latin typeface="Calibri" panose="020F0502020204030204" pitchFamily="34" charset="0"/>
+              <a:cs typeface="Calibri" panose="020F0502020204030204" pitchFamily="34" charset="0"/>
+            </a:endParaRPr>
           </a:p>
         </p:txBody>
       </p:sp>
@@ -4653,13 +4730,16 @@
                 <a:solidFill>
                   <a:srgbClr val="F8FAFC"/>
                 </a:solidFill>
-                <a:latin typeface="Playfair Display" pitchFamily="34" charset="0"/>
+                <a:latin typeface="Calibri" panose="020F0502020204030204" pitchFamily="34" charset="0"/>
                 <a:ea typeface="Playfair Display" pitchFamily="34" charset="-122"/>
-                <a:cs typeface="Playfair Display" pitchFamily="34" charset="-120"/>
+                <a:cs typeface="Calibri" panose="020F0502020204030204" pitchFamily="34" charset="0"/>
               </a:rPr>
               <a:t>The business value in plain language</a:t>
             </a:r>
-            <a:endParaRPr lang="en-US" sz="3600" dirty="0"/>
+            <a:endParaRPr lang="en-US" sz="3600" dirty="0">
+              <a:latin typeface="Calibri" panose="020F0502020204030204" pitchFamily="34" charset="0"/>
+              <a:cs typeface="Calibri" panose="020F0502020204030204" pitchFamily="34" charset="0"/>
+            </a:endParaRPr>
           </a:p>
         </p:txBody>
       </p:sp>
@@ -4695,13 +4775,16 @@
                 <a:solidFill>
                   <a:srgbClr val="C9A84C"/>
                 </a:solidFill>
-                <a:latin typeface="ui-sans-serif" pitchFamily="34" charset="0"/>
-                <a:ea typeface="ui-sans-serif" pitchFamily="34" charset="-122"/>
-                <a:cs typeface="ui-sans-serif" pitchFamily="34" charset="-120"/>
+                <a:latin typeface="Calibri" panose="020F0502020204030204" pitchFamily="34" charset="0"/>
+                <a:ea typeface="ui-sans-serif" pitchFamily="34" charset="-122"/>
+                <a:cs typeface="Calibri" panose="020F0502020204030204" pitchFamily="34" charset="0"/>
               </a:rPr>
               <a:t>17</a:t>
             </a:r>
-            <a:endParaRPr lang="en-US" sz="3600" dirty="0"/>
+            <a:endParaRPr lang="en-US" sz="3600" dirty="0">
+              <a:latin typeface="Calibri" panose="020F0502020204030204" pitchFamily="34" charset="0"/>
+              <a:cs typeface="Calibri" panose="020F0502020204030204" pitchFamily="34" charset="0"/>
+            </a:endParaRPr>
           </a:p>
         </p:txBody>
       </p:sp>
@@ -4821,13 +4904,16 @@
                 <a:solidFill>
                   <a:srgbClr val="C9A84C"/>
                 </a:solidFill>
-                <a:latin typeface="ui-sans-serif" pitchFamily="34" charset="0"/>
-                <a:ea typeface="ui-sans-serif" pitchFamily="34" charset="-122"/>
-                <a:cs typeface="ui-sans-serif" pitchFamily="34" charset="-120"/>
+                <a:latin typeface="Calibri" panose="020F0502020204030204" pitchFamily="34" charset="0"/>
+                <a:ea typeface="ui-sans-serif" pitchFamily="34" charset="-122"/>
+                <a:cs typeface="Calibri" panose="020F0502020204030204" pitchFamily="34" charset="0"/>
               </a:rPr>
               <a:t>API</a:t>
             </a:r>
-            <a:endParaRPr lang="en-US" sz="3600" dirty="0"/>
+            <a:endParaRPr lang="en-US" sz="3600" dirty="0">
+              <a:latin typeface="Calibri" panose="020F0502020204030204" pitchFamily="34" charset="0"/>
+              <a:cs typeface="Calibri" panose="020F0502020204030204" pitchFamily="34" charset="0"/>
+            </a:endParaRPr>
           </a:p>
         </p:txBody>
       </p:sp>
@@ -4947,13 +5033,16 @@
                 <a:solidFill>
                   <a:srgbClr val="C9A84C"/>
                 </a:solidFill>
-                <a:latin typeface="ui-sans-serif" pitchFamily="34" charset="0"/>
-                <a:ea typeface="ui-sans-serif" pitchFamily="34" charset="-122"/>
-                <a:cs typeface="ui-sans-serif" pitchFamily="34" charset="-120"/>
+                <a:latin typeface="Calibri" panose="020F0502020204030204" pitchFamily="34" charset="0"/>
+                <a:ea typeface="ui-sans-serif" pitchFamily="34" charset="-122"/>
+                <a:cs typeface="Calibri" panose="020F0502020204030204" pitchFamily="34" charset="0"/>
               </a:rPr>
               <a:t>JSON</a:t>
             </a:r>
-            <a:endParaRPr lang="en-US" sz="3600" dirty="0"/>
+            <a:endParaRPr lang="en-US" sz="3600" dirty="0">
+              <a:latin typeface="Calibri" panose="020F0502020204030204" pitchFamily="34" charset="0"/>
+              <a:cs typeface="Calibri" panose="020F0502020204030204" pitchFamily="34" charset="0"/>
+            </a:endParaRPr>
           </a:p>
         </p:txBody>
       </p:sp>
